--- a/PPTs/L5-Exercises.pptx
+++ b/PPTs/L5-Exercises.pptx
@@ -215,14 +215,14 @@
           <a:effectLst/>
           <a:extLst>
             <a:ext uri="{909E8E84-426E-40dd-AFC4-6F175D3DCCD1}">
-              <a14:hiddenFill xmlns="" xmlns:a14="http://schemas.microsoft.com/office/drawing/2010/main">
+              <a14:hiddenFill xmlns:a14="http://schemas.microsoft.com/office/drawing/2010/main" xmlns="">
                 <a:solidFill>
                   <a:schemeClr val="bg1"/>
                 </a:solidFill>
               </a14:hiddenFill>
             </a:ext>
             <a:ext uri="{91240B29-F687-4f45-9708-019B960494DF}">
-              <a14:hiddenLine xmlns="" xmlns:a14="http://schemas.microsoft.com/office/drawing/2010/main" w="12700">
+              <a14:hiddenLine xmlns:a14="http://schemas.microsoft.com/office/drawing/2010/main" xmlns="" w="12700">
                 <a:pattFill prst="narHorz">
                   <a:fgClr>
                     <a:schemeClr val="tx1"/>
@@ -237,7 +237,7 @@
               </a14:hiddenLine>
             </a:ext>
             <a:ext uri="{AF507438-7753-43e0-B8FC-AC1667EBCBE1}">
-              <a14:hiddenEffects xmlns="" xmlns:a14="http://schemas.microsoft.com/office/drawing/2010/main">
+              <a14:hiddenEffects xmlns:a14="http://schemas.microsoft.com/office/drawing/2010/main" xmlns="">
                 <a:effectLst>
                   <a:outerShdw dist="35921" dir="2700000" algn="ctr" rotWithShape="0">
                     <a:schemeClr val="bg2"/>
@@ -343,14 +343,14 @@
           <a:effectLst/>
           <a:extLst>
             <a:ext uri="{909E8E84-426E-40dd-AFC4-6F175D3DCCD1}">
-              <a14:hiddenFill xmlns="" xmlns:a14="http://schemas.microsoft.com/office/drawing/2010/main">
+              <a14:hiddenFill xmlns:a14="http://schemas.microsoft.com/office/drawing/2010/main" xmlns="">
                 <a:solidFill>
                   <a:schemeClr val="bg1"/>
                 </a:solidFill>
               </a14:hiddenFill>
             </a:ext>
             <a:ext uri="{91240B29-F687-4f45-9708-019B960494DF}">
-              <a14:hiddenLine xmlns="" xmlns:a14="http://schemas.microsoft.com/office/drawing/2010/main" w="12700">
+              <a14:hiddenLine xmlns:a14="http://schemas.microsoft.com/office/drawing/2010/main" xmlns="" w="12700">
                 <a:pattFill prst="narHorz">
                   <a:fgClr>
                     <a:schemeClr val="tx1"/>
@@ -365,7 +365,7 @@
               </a14:hiddenLine>
             </a:ext>
             <a:ext uri="{AF507438-7753-43e0-B8FC-AC1667EBCBE1}">
-              <a14:hiddenEffects xmlns="" xmlns:a14="http://schemas.microsoft.com/office/drawing/2010/main">
+              <a14:hiddenEffects xmlns:a14="http://schemas.microsoft.com/office/drawing/2010/main" xmlns="">
                 <a:effectLst>
                   <a:outerShdw dist="35921" dir="2700000" algn="ctr" rotWithShape="0">
                     <a:schemeClr val="bg2"/>
@@ -433,17 +433,17 @@
           <a:effectLst/>
           <a:extLst>
             <a:ext uri="{FAA26D3D-D897-4be2-8F04-BA451C77F1D7}">
-              <ma14:placeholderFlag xmlns="" xmlns:ma14="http://schemas.microsoft.com/office/mac/drawingml/2011/main" val="1"/>
+              <ma14:placeholderFlag xmlns:ma14="http://schemas.microsoft.com/office/mac/drawingml/2011/main" xmlns="" val="1"/>
             </a:ext>
             <a:ext uri="{909E8E84-426E-40dd-AFC4-6F175D3DCCD1}">
-              <a14:hiddenFill xmlns="" xmlns:a14="http://schemas.microsoft.com/office/drawing/2010/main">
+              <a14:hiddenFill xmlns:a14="http://schemas.microsoft.com/office/drawing/2010/main" xmlns="">
                 <a:solidFill>
                   <a:srgbClr val="FFFFFF"/>
                 </a:solidFill>
               </a14:hiddenFill>
             </a:ext>
             <a:ext uri="{AF507438-7753-43e0-B8FC-AC1667EBCBE1}">
-              <a14:hiddenEffects xmlns="" xmlns:a14="http://schemas.microsoft.com/office/drawing/2010/main">
+              <a14:hiddenEffects xmlns:a14="http://schemas.microsoft.com/office/drawing/2010/main" xmlns="">
                 <a:effectLst>
                   <a:outerShdw blurRad="63500" dist="38099" dir="2700000" algn="ctr" rotWithShape="0">
                     <a:srgbClr val="000000">
@@ -454,7 +454,7 @@
               </a14:hiddenEffects>
             </a:ext>
             <a:ext uri="{53640926-AAD7-44d8-BBD7-CCE9431645EC}">
-              <a14:shadowObscured xmlns="" xmlns:a14="http://schemas.microsoft.com/office/drawing/2010/main" val="1"/>
+              <a14:shadowObscured xmlns:a14="http://schemas.microsoft.com/office/drawing/2010/main" xmlns="" val="1"/>
             </a:ext>
           </a:extLst>
         </p:spPr>
@@ -484,14 +484,14 @@
           <a:effectLst/>
           <a:extLst>
             <a:ext uri="{909E8E84-426E-40dd-AFC4-6F175D3DCCD1}">
-              <a14:hiddenFill xmlns="" xmlns:a14="http://schemas.microsoft.com/office/drawing/2010/main">
+              <a14:hiddenFill xmlns:a14="http://schemas.microsoft.com/office/drawing/2010/main" xmlns="">
                 <a:solidFill>
                   <a:schemeClr val="bg1"/>
                 </a:solidFill>
               </a14:hiddenFill>
             </a:ext>
             <a:ext uri="{91240B29-F687-4f45-9708-019B960494DF}">
-              <a14:hiddenLine xmlns="" xmlns:a14="http://schemas.microsoft.com/office/drawing/2010/main" w="12700">
+              <a14:hiddenLine xmlns:a14="http://schemas.microsoft.com/office/drawing/2010/main" xmlns="" w="12700">
                 <a:pattFill prst="narHorz">
                   <a:fgClr>
                     <a:schemeClr val="tx1"/>
@@ -506,7 +506,7 @@
               </a14:hiddenLine>
             </a:ext>
             <a:ext uri="{AF507438-7753-43e0-B8FC-AC1667EBCBE1}">
-              <a14:hiddenEffects xmlns="" xmlns:a14="http://schemas.microsoft.com/office/drawing/2010/main">
+              <a14:hiddenEffects xmlns:a14="http://schemas.microsoft.com/office/drawing/2010/main" xmlns="">
                 <a:effectLst>
                   <a:outerShdw dist="35921" dir="2700000" algn="ctr" rotWithShape="0">
                     <a:schemeClr val="bg2"/>
@@ -756,10 +756,10 @@
         <p:spPr>
           <a:extLst>
             <a:ext uri="{FAA26D3D-D897-4be2-8F04-BA451C77F1D7}">
-              <ma14:placeholderFlag xmlns="" xmlns:ma14="http://schemas.microsoft.com/office/mac/drawingml/2011/main" val="1"/>
+              <ma14:placeholderFlag xmlns:ma14="http://schemas.microsoft.com/office/mac/drawingml/2011/main" xmlns="" val="1"/>
             </a:ext>
             <a:ext uri="{AF507438-7753-43e0-B8FC-AC1667EBCBE1}">
-              <a14:hiddenEffects xmlns="" xmlns:a14="http://schemas.microsoft.com/office/drawing/2010/main">
+              <a14:hiddenEffects xmlns:a14="http://schemas.microsoft.com/office/drawing/2010/main" xmlns="">
                 <a:effectLst>
                   <a:outerShdw blurRad="63500" dist="38099" dir="2700000" algn="ctr" rotWithShape="0">
                     <a:schemeClr val="bg2">
@@ -837,41 +837,7 @@
           <a:bodyPr/>
           <a:lstStyle/>
           <a:p>
-            <a:r>
-              <a:rPr lang="en-GB" b="0" i="0" dirty="0">
-                <a:effectLst/>
-                <a:latin typeface="fkGroteskNeue"/>
-              </a:rPr>
-              <a:t>So, the average of 2, 7, 5, 6, and 8 is 5.6.</a:t>
-            </a:r>
-          </a:p>
-          <a:p>
-            <a:r>
-              <a:rPr lang="en-GB" b="0" i="0" dirty="0">
-                <a:effectLst/>
-                <a:latin typeface="fkGroteskNeue"/>
-              </a:rPr>
-              <a:t>The average of the numbers 2, 7, 5, 9, and 4 is 5.4.</a:t>
-            </a:r>
-          </a:p>
-          <a:p>
-            <a:r>
-              <a:rPr lang="en-GB" b="0" i="0" dirty="0">
-                <a:effectLst/>
-                <a:latin typeface="fkGroteskNeue"/>
-              </a:rPr>
-              <a:t>The average of the numbers 2, 8, 1, 9, and 4 is 4.8.</a:t>
-            </a:r>
-          </a:p>
-          <a:p>
-            <a:r>
-              <a:rPr lang="en-GB" b="0" i="0" dirty="0">
-                <a:effectLst/>
-                <a:latin typeface="fkGroteskNeue"/>
-              </a:rPr>
-              <a:t>The average of the numbers 3, 12, 1, 9, and 7 is 6.4.</a:t>
-            </a:r>
-            <a:endParaRPr lang="en-SE" dirty="0"/>
+            <a:endParaRPr/>
           </a:p>
         </p:txBody>
       </p:sp>
@@ -950,41 +916,7 @@
           <a:bodyPr/>
           <a:lstStyle/>
           <a:p>
-            <a:r>
-              <a:rPr lang="en-GB" b="0" i="0" dirty="0">
-                <a:effectLst/>
-                <a:latin typeface="fkGroteskNeue"/>
-              </a:rPr>
-              <a:t>So, the average of 2, 7, 5, 6, and 8 is 5.6.</a:t>
-            </a:r>
-          </a:p>
-          <a:p>
-            <a:r>
-              <a:rPr lang="en-GB" b="0" i="0" dirty="0">
-                <a:effectLst/>
-                <a:latin typeface="fkGroteskNeue"/>
-              </a:rPr>
-              <a:t>The average of the numbers 2, 7, 5, 9, and 4 is 5.4.</a:t>
-            </a:r>
-          </a:p>
-          <a:p>
-            <a:r>
-              <a:rPr lang="en-GB" b="0" i="0" dirty="0">
-                <a:effectLst/>
-                <a:latin typeface="fkGroteskNeue"/>
-              </a:rPr>
-              <a:t>The average of the numbers 2, 8, 1, 9, and 4 is 4.8.</a:t>
-            </a:r>
-          </a:p>
-          <a:p>
-            <a:r>
-              <a:rPr lang="en-GB" b="0" i="0" dirty="0">
-                <a:effectLst/>
-                <a:latin typeface="fkGroteskNeue"/>
-              </a:rPr>
-              <a:t>The average of the numbers 3, 12, 1, 9, and 7 is 6.4.</a:t>
-            </a:r>
-            <a:endParaRPr lang="en-SE" dirty="0"/>
+            <a:endParaRPr/>
           </a:p>
         </p:txBody>
       </p:sp>
@@ -2896,17 +2828,17 @@
           <a:effectLst/>
           <a:extLst>
             <a:ext uri="{FAA26D3D-D897-4be2-8F04-BA451C77F1D7}">
-              <ma14:placeholderFlag xmlns="" xmlns:ma14="http://schemas.microsoft.com/office/mac/drawingml/2011/main" val="1"/>
+              <ma14:placeholderFlag xmlns:ma14="http://schemas.microsoft.com/office/mac/drawingml/2011/main" xmlns="" val="1"/>
             </a:ext>
             <a:ext uri="{909E8E84-426E-40dd-AFC4-6F175D3DCCD1}">
-              <a14:hiddenFill xmlns="" xmlns:a14="http://schemas.microsoft.com/office/drawing/2010/main">
+              <a14:hiddenFill xmlns:a14="http://schemas.microsoft.com/office/drawing/2010/main" xmlns="">
                 <a:solidFill>
                   <a:schemeClr val="bg1"/>
                 </a:solidFill>
               </a14:hiddenFill>
             </a:ext>
             <a:ext uri="{91240B29-F687-4f45-9708-019B960494DF}">
-              <a14:hiddenLine xmlns="" xmlns:a14="http://schemas.microsoft.com/office/drawing/2010/main" w="12700">
+              <a14:hiddenLine xmlns:a14="http://schemas.microsoft.com/office/drawing/2010/main" xmlns="" w="12700">
                 <a:pattFill prst="narHorz">
                   <a:fgClr>
                     <a:schemeClr val="tx1"/>
@@ -2921,7 +2853,7 @@
               </a14:hiddenLine>
             </a:ext>
             <a:ext uri="{AF507438-7753-43e0-B8FC-AC1667EBCBE1}">
-              <a14:hiddenEffects xmlns="" xmlns:a14="http://schemas.microsoft.com/office/drawing/2010/main">
+              <a14:hiddenEffects xmlns:a14="http://schemas.microsoft.com/office/drawing/2010/main" xmlns="">
                 <a:effectLst>
                   <a:outerShdw blurRad="63500" dist="38099" dir="2700000" algn="ctr" rotWithShape="0">
                     <a:schemeClr val="bg2">
@@ -2974,17 +2906,17 @@
           <a:effectLst/>
           <a:extLst>
             <a:ext uri="{FAA26D3D-D897-4be2-8F04-BA451C77F1D7}">
-              <ma14:placeholderFlag xmlns="" xmlns:ma14="http://schemas.microsoft.com/office/mac/drawingml/2011/main" val="1"/>
+              <ma14:placeholderFlag xmlns:ma14="http://schemas.microsoft.com/office/mac/drawingml/2011/main" xmlns="" val="1"/>
             </a:ext>
             <a:ext uri="{909E8E84-426E-40dd-AFC4-6F175D3DCCD1}">
-              <a14:hiddenFill xmlns="" xmlns:a14="http://schemas.microsoft.com/office/drawing/2010/main">
+              <a14:hiddenFill xmlns:a14="http://schemas.microsoft.com/office/drawing/2010/main" xmlns="">
                 <a:solidFill>
                   <a:schemeClr val="bg1"/>
                 </a:solidFill>
               </a14:hiddenFill>
             </a:ext>
             <a:ext uri="{91240B29-F687-4f45-9708-019B960494DF}">
-              <a14:hiddenLine xmlns="" xmlns:a14="http://schemas.microsoft.com/office/drawing/2010/main" w="12700">
+              <a14:hiddenLine xmlns:a14="http://schemas.microsoft.com/office/drawing/2010/main" xmlns="" w="12700">
                 <a:pattFill prst="narHorz">
                   <a:fgClr>
                     <a:schemeClr val="tx1"/>
@@ -2999,7 +2931,7 @@
               </a14:hiddenLine>
             </a:ext>
             <a:ext uri="{AF507438-7753-43e0-B8FC-AC1667EBCBE1}">
-              <a14:hiddenEffects xmlns="" xmlns:a14="http://schemas.microsoft.com/office/drawing/2010/main">
+              <a14:hiddenEffects xmlns:a14="http://schemas.microsoft.com/office/drawing/2010/main" xmlns="">
                 <a:effectLst>
                   <a:outerShdw blurRad="63500" dist="38099" dir="2700000" algn="ctr" rotWithShape="0">
                     <a:schemeClr val="bg2">
@@ -3078,14 +3010,14 @@
           <a:effectLst/>
           <a:extLst>
             <a:ext uri="{909E8E84-426E-40dd-AFC4-6F175D3DCCD1}">
-              <a14:hiddenFill xmlns="" xmlns:a14="http://schemas.microsoft.com/office/drawing/2010/main">
+              <a14:hiddenFill xmlns:a14="http://schemas.microsoft.com/office/drawing/2010/main" xmlns="">
                 <a:solidFill>
                   <a:schemeClr val="bg1"/>
                 </a:solidFill>
               </a14:hiddenFill>
             </a:ext>
             <a:ext uri="{91240B29-F687-4f45-9708-019B960494DF}">
-              <a14:hiddenLine xmlns="" xmlns:a14="http://schemas.microsoft.com/office/drawing/2010/main" w="12700">
+              <a14:hiddenLine xmlns:a14="http://schemas.microsoft.com/office/drawing/2010/main" xmlns="" w="12700">
                 <a:pattFill prst="narHorz">
                   <a:fgClr>
                     <a:schemeClr val="tx1"/>
@@ -3100,7 +3032,7 @@
               </a14:hiddenLine>
             </a:ext>
             <a:ext uri="{AF507438-7753-43e0-B8FC-AC1667EBCBE1}">
-              <a14:hiddenEffects xmlns="" xmlns:a14="http://schemas.microsoft.com/office/drawing/2010/main">
+              <a14:hiddenEffects xmlns:a14="http://schemas.microsoft.com/office/drawing/2010/main" xmlns="">
                 <a:effectLst>
                   <a:outerShdw dist="35921" dir="2700000" algn="ctr" rotWithShape="0">
                     <a:schemeClr val="bg2"/>
@@ -3166,12 +3098,12 @@
           <a:effectLst/>
           <a:extLst>
             <a:ext uri="{909E8E84-426E-40dd-AFC4-6F175D3DCCD1}">
-              <a14:hiddenFill xmlns="" xmlns:a14="http://schemas.microsoft.com/office/drawing/2010/main">
+              <a14:hiddenFill xmlns:a14="http://schemas.microsoft.com/office/drawing/2010/main" xmlns="">
                 <a:noFill/>
               </a14:hiddenFill>
             </a:ext>
             <a:ext uri="{AF507438-7753-43e0-B8FC-AC1667EBCBE1}">
-              <a14:hiddenEffects xmlns="" xmlns:a14="http://schemas.microsoft.com/office/drawing/2010/main">
+              <a14:hiddenEffects xmlns:a14="http://schemas.microsoft.com/office/drawing/2010/main" xmlns="">
                 <a:effectLst>
                   <a:outerShdw blurRad="63500" dist="38099" dir="2700000" algn="ctr" rotWithShape="0">
                     <a:schemeClr val="bg2">
@@ -4216,7 +4148,7 @@
             </a:r>
             <a:r>
               <a:rPr lang="en-GB" dirty="0" err="1"/>
-              <a:t>timeslice</a:t>
+              <a:t>time</a:t>
             </a:r>
             <a:r>
               <a:rPr lang="en-GB" dirty="0"/>
@@ -4226,7 +4158,7 @@
           <a:p>
             <a:r>
               <a:rPr lang="en-GB" dirty="0"/>
-              <a:t>2) Compute the finish times and response times for all 5 processes, and the average response time. (If the division is hard, write a fraction like 28/5 instead of 5.6)</a:t>
+              <a:t>2) Compute the finish times and response times for all processes, and the average response time. (If the division is hard, write a fraction like 28/5 instead of 5.6)</a:t>
             </a:r>
           </a:p>
         </p:txBody>
@@ -4312,8 +4244,8 @@
           </p:nvPr>
         </p:nvGraphicFramePr>
         <p:xfrm>
-          <a:off x="850898" y="1240518"/>
-          <a:ext cx="10490204" cy="2651760"/>
+          <a:off x="571185" y="1240518"/>
+          <a:ext cx="10769917" cy="2651760"/>
         </p:xfrm>
         <a:graphic>
           <a:graphicData uri="http://schemas.openxmlformats.org/drawingml/2006/table">
@@ -4322,7 +4254,7 @@
                 <a:tableStyleId>{5C22544A-7EE6-4342-B048-85BDC9FD1C3A}</a:tableStyleId>
               </a:tblPr>
               <a:tblGrid>
-                <a:gridCol w="320287">
+                <a:gridCol w="600000">
                   <a:extLst>
                     <a:ext uri="{9D8B030D-6E8A-4147-A177-3AD203B41FA5}">
                       <a16:colId xmlns:a16="http://schemas.microsoft.com/office/drawing/2014/main" val="3897766631"/>
@@ -4357,42 +4289,42 @@
                     </a:ext>
                   </a:extLst>
                 </a:gridCol>
-                <a:gridCol w="1072097">
+                <a:gridCol w="922097">
                   <a:extLst>
                     <a:ext uri="{9D8B030D-6E8A-4147-A177-3AD203B41FA5}">
                       <a16:colId xmlns:a16="http://schemas.microsoft.com/office/drawing/2014/main" val="2248621"/>
                     </a:ext>
                   </a:extLst>
                 </a:gridCol>
-                <a:gridCol w="1072097">
+                <a:gridCol w="1222097">
                   <a:extLst>
                     <a:ext uri="{9D8B030D-6E8A-4147-A177-3AD203B41FA5}">
                       <a16:colId xmlns:a16="http://schemas.microsoft.com/office/drawing/2014/main" val="2712044097"/>
                     </a:ext>
                   </a:extLst>
                 </a:gridCol>
-                <a:gridCol w="1072097">
+                <a:gridCol w="922097">
                   <a:extLst>
                     <a:ext uri="{9D8B030D-6E8A-4147-A177-3AD203B41FA5}">
                       <a16:colId xmlns:a16="http://schemas.microsoft.com/office/drawing/2014/main" val="4072710305"/>
                     </a:ext>
                   </a:extLst>
                 </a:gridCol>
-                <a:gridCol w="1072097">
+                <a:gridCol w="1222097">
                   <a:extLst>
                     <a:ext uri="{9D8B030D-6E8A-4147-A177-3AD203B41FA5}">
                       <a16:colId xmlns:a16="http://schemas.microsoft.com/office/drawing/2014/main" val="3685768401"/>
                     </a:ext>
                   </a:extLst>
                 </a:gridCol>
-                <a:gridCol w="1072097">
+                <a:gridCol w="922097">
                   <a:extLst>
                     <a:ext uri="{9D8B030D-6E8A-4147-A177-3AD203B41FA5}">
                       <a16:colId xmlns:a16="http://schemas.microsoft.com/office/drawing/2014/main" val="3601507115"/>
                     </a:ext>
                   </a:extLst>
                 </a:gridCol>
-                <a:gridCol w="1072097">
+                <a:gridCol w="1222097">
                   <a:extLst>
                     <a:ext uri="{9D8B030D-6E8A-4147-A177-3AD203B41FA5}">
                       <a16:colId xmlns:a16="http://schemas.microsoft.com/office/drawing/2014/main" val="2233393087"/>
@@ -5660,122 +5592,6 @@
           </a:graphicData>
         </a:graphic>
       </p:graphicFrame>
-      <p:sp>
-        <p:nvSpPr>
-          <p:cNvPr id="11" name="文本框 10">
-            <a:extLst>
-              <a:ext uri="{FF2B5EF4-FFF2-40B4-BE49-F238E27FC236}">
-                <a16:creationId xmlns:a16="http://schemas.microsoft.com/office/drawing/2014/main" id="{7B95E552-BB9C-9DD5-CCC3-40AA06825068}"/>
-              </a:ext>
-            </a:extLst>
-          </p:cNvPr>
-          <p:cNvSpPr txBox="1"/>
-          <p:nvPr/>
-        </p:nvSpPr>
-        <p:spPr>
-          <a:xfrm>
-            <a:off x="4942626" y="7629372"/>
-            <a:ext cx="1031051" cy="369332"/>
-          </a:xfrm>
-          <a:prstGeom prst="rect">
-            <a:avLst/>
-          </a:prstGeom>
-          <a:noFill/>
-        </p:spPr>
-        <p:txBody>
-          <a:bodyPr wrap="none" rtlCol="0">
-            <a:spAutoFit/>
-          </a:bodyPr>
-          <a:lstStyle/>
-          <a:p>
-            <a:pPr defTabSz="457200" eaLnBrk="1" fontAlgn="auto" hangingPunct="1">
-              <a:spcBef>
-                <a:spcPts val="0"/>
-              </a:spcBef>
-              <a:spcAft>
-                <a:spcPts val="0"/>
-              </a:spcAft>
-            </a:pPr>
-            <a:r>
-              <a:rPr lang="en-US" altLang="zh-CN" b="0" dirty="0">
-                <a:solidFill>
-                  <a:srgbClr val="000000"/>
-                </a:solidFill>
-                <a:latin typeface="Arial" panose="020B0604020202020204"/>
-                <a:ea typeface="黑体" panose="02010609060101010101" pitchFamily="49" charset="-122"/>
-                <a:cs typeface="+mn-cs"/>
-              </a:rPr>
-              <a:t>B arrival</a:t>
-            </a:r>
-            <a:endParaRPr lang="en-US" b="0" dirty="0">
-              <a:solidFill>
-                <a:srgbClr val="000000"/>
-              </a:solidFill>
-              <a:latin typeface="Arial" panose="020B0604020202020204"/>
-              <a:ea typeface="+mn-ea"/>
-              <a:cs typeface="+mn-cs"/>
-            </a:endParaRPr>
-          </a:p>
-        </p:txBody>
-      </p:sp>
-      <p:sp>
-        <p:nvSpPr>
-          <p:cNvPr id="42" name="文本框 10">
-            <a:extLst>
-              <a:ext uri="{FF2B5EF4-FFF2-40B4-BE49-F238E27FC236}">
-                <a16:creationId xmlns:a16="http://schemas.microsoft.com/office/drawing/2014/main" id="{2193EE09-BEED-D6C1-361A-A16E6E3D7CBF}"/>
-              </a:ext>
-            </a:extLst>
-          </p:cNvPr>
-          <p:cNvSpPr txBox="1"/>
-          <p:nvPr/>
-        </p:nvSpPr>
-        <p:spPr>
-          <a:xfrm>
-            <a:off x="5944367" y="7629372"/>
-            <a:ext cx="1043876" cy="369332"/>
-          </a:xfrm>
-          <a:prstGeom prst="rect">
-            <a:avLst/>
-          </a:prstGeom>
-          <a:noFill/>
-        </p:spPr>
-        <p:txBody>
-          <a:bodyPr wrap="none" rtlCol="0">
-            <a:spAutoFit/>
-          </a:bodyPr>
-          <a:lstStyle/>
-          <a:p>
-            <a:pPr defTabSz="457200" eaLnBrk="1" fontAlgn="auto" hangingPunct="1">
-              <a:spcBef>
-                <a:spcPts val="0"/>
-              </a:spcBef>
-              <a:spcAft>
-                <a:spcPts val="0"/>
-              </a:spcAft>
-            </a:pPr>
-            <a:r>
-              <a:rPr lang="en-US" altLang="zh-CN" b="0" dirty="0">
-                <a:solidFill>
-                  <a:srgbClr val="000000"/>
-                </a:solidFill>
-                <a:latin typeface="Arial" panose="020B0604020202020204"/>
-                <a:ea typeface="黑体" panose="02010609060101010101" pitchFamily="49" charset="-122"/>
-                <a:cs typeface="+mn-cs"/>
-              </a:rPr>
-              <a:t>C arrival</a:t>
-            </a:r>
-            <a:endParaRPr lang="en-US" b="0" dirty="0">
-              <a:solidFill>
-                <a:srgbClr val="000000"/>
-              </a:solidFill>
-              <a:latin typeface="Arial" panose="020B0604020202020204"/>
-              <a:ea typeface="+mn-ea"/>
-              <a:cs typeface="+mn-cs"/>
-            </a:endParaRPr>
-          </a:p>
-        </p:txBody>
-      </p:sp>
       <p:graphicFrame>
         <p:nvGraphicFramePr>
           <p:cNvPr id="32" name="Table 31">
@@ -6769,115 +6585,6 @@
     <a:masterClrMapping/>
   </p:clrMapOvr>
   <p:transition/>
-  <p:timing>
-    <p:tnLst>
-      <p:par>
-        <p:cTn id="1" dur="indefinite" restart="never" nodeType="tmRoot">
-          <p:childTnLst>
-            <p:seq concurrent="1" nextAc="seek">
-              <p:cTn id="2" dur="indefinite" nodeType="mainSeq">
-                <p:childTnLst>
-                  <p:par>
-                    <p:cTn id="3" fill="hold">
-                      <p:stCondLst>
-                        <p:cond delay="indefinite"/>
-                        <p:cond evt="onBegin" delay="0">
-                          <p:tn val="2"/>
-                        </p:cond>
-                      </p:stCondLst>
-                      <p:childTnLst>
-                        <p:par>
-                          <p:cTn id="4" fill="hold">
-                            <p:stCondLst>
-                              <p:cond delay="0"/>
-                            </p:stCondLst>
-                            <p:childTnLst>
-                              <p:par>
-                                <p:cTn id="5" presetID="1" presetClass="entr" presetSubtype="0" fill="hold" grpId="0" nodeType="withEffect">
-                                  <p:stCondLst>
-                                    <p:cond delay="0"/>
-                                  </p:stCondLst>
-                                  <p:childTnLst>
-                                    <p:set>
-                                      <p:cBhvr>
-                                        <p:cTn id="6" dur="1" fill="hold">
-                                          <p:stCondLst>
-                                            <p:cond delay="0"/>
-                                          </p:stCondLst>
-                                        </p:cTn>
-                                        <p:tgtEl>
-                                          <p:spTgt spid="11"/>
-                                        </p:tgtEl>
-                                        <p:attrNameLst>
-                                          <p:attrName>style.visibility</p:attrName>
-                                        </p:attrNameLst>
-                                      </p:cBhvr>
-                                      <p:to>
-                                        <p:strVal val="visible"/>
-                                      </p:to>
-                                    </p:set>
-                                  </p:childTnLst>
-                                </p:cTn>
-                              </p:par>
-                              <p:par>
-                                <p:cTn id="7" presetID="1" presetClass="entr" presetSubtype="0" fill="hold" grpId="0" nodeType="withEffect">
-                                  <p:stCondLst>
-                                    <p:cond delay="0"/>
-                                  </p:stCondLst>
-                                  <p:childTnLst>
-                                    <p:set>
-                                      <p:cBhvr>
-                                        <p:cTn id="8" dur="1" fill="hold">
-                                          <p:stCondLst>
-                                            <p:cond delay="0"/>
-                                          </p:stCondLst>
-                                        </p:cTn>
-                                        <p:tgtEl>
-                                          <p:spTgt spid="42"/>
-                                        </p:tgtEl>
-                                        <p:attrNameLst>
-                                          <p:attrName>style.visibility</p:attrName>
-                                        </p:attrNameLst>
-                                      </p:cBhvr>
-                                      <p:to>
-                                        <p:strVal val="visible"/>
-                                      </p:to>
-                                    </p:set>
-                                  </p:childTnLst>
-                                </p:cTn>
-                              </p:par>
-                            </p:childTnLst>
-                          </p:cTn>
-                        </p:par>
-                      </p:childTnLst>
-                    </p:cTn>
-                  </p:par>
-                </p:childTnLst>
-              </p:cTn>
-              <p:prevCondLst>
-                <p:cond evt="onPrev" delay="0">
-                  <p:tgtEl>
-                    <p:sldTgt/>
-                  </p:tgtEl>
-                </p:cond>
-              </p:prevCondLst>
-              <p:nextCondLst>
-                <p:cond evt="onNext" delay="0">
-                  <p:tgtEl>
-                    <p:sldTgt/>
-                  </p:tgtEl>
-                </p:cond>
-              </p:nextCondLst>
-            </p:seq>
-          </p:childTnLst>
-        </p:cTn>
-      </p:par>
-    </p:tnLst>
-    <p:bldLst>
-      <p:bldP spid="11" grpId="0"/>
-      <p:bldP spid="42" grpId="0"/>
-    </p:bldLst>
-  </p:timing>
 </p:sld>
 </file>
 
@@ -6948,8 +6655,8 @@
           <p:nvPr/>
         </p:nvGraphicFramePr>
         <p:xfrm>
-          <a:off x="530799" y="889000"/>
-          <a:ext cx="10490204" cy="2743200"/>
+          <a:off x="251086" y="889000"/>
+          <a:ext cx="10769917" cy="2743200"/>
         </p:xfrm>
         <a:graphic>
           <a:graphicData uri="http://schemas.openxmlformats.org/drawingml/2006/table">
@@ -6958,7 +6665,7 @@
                 <a:tableStyleId>{5C22544A-7EE6-4342-B048-85BDC9FD1C3A}</a:tableStyleId>
               </a:tblPr>
               <a:tblGrid>
-                <a:gridCol w="320287">
+                <a:gridCol w="600000">
                   <a:extLst>
                     <a:ext uri="{9D8B030D-6E8A-4147-A177-3AD203B41FA5}">
                       <a16:colId xmlns:a16="http://schemas.microsoft.com/office/drawing/2014/main" val="3897766631"/>
@@ -6993,42 +6700,42 @@
                     </a:ext>
                   </a:extLst>
                 </a:gridCol>
-                <a:gridCol w="1072097">
+                <a:gridCol w="922097">
                   <a:extLst>
                     <a:ext uri="{9D8B030D-6E8A-4147-A177-3AD203B41FA5}">
                       <a16:colId xmlns:a16="http://schemas.microsoft.com/office/drawing/2014/main" val="2248621"/>
                     </a:ext>
                   </a:extLst>
                 </a:gridCol>
-                <a:gridCol w="1072097">
+                <a:gridCol w="1222097">
                   <a:extLst>
                     <a:ext uri="{9D8B030D-6E8A-4147-A177-3AD203B41FA5}">
                       <a16:colId xmlns:a16="http://schemas.microsoft.com/office/drawing/2014/main" val="2712044097"/>
                     </a:ext>
                   </a:extLst>
                 </a:gridCol>
-                <a:gridCol w="1072097">
+                <a:gridCol w="922097">
                   <a:extLst>
                     <a:ext uri="{9D8B030D-6E8A-4147-A177-3AD203B41FA5}">
                       <a16:colId xmlns:a16="http://schemas.microsoft.com/office/drawing/2014/main" val="4072710305"/>
                     </a:ext>
                   </a:extLst>
                 </a:gridCol>
-                <a:gridCol w="1072097">
+                <a:gridCol w="1222097">
                   <a:extLst>
                     <a:ext uri="{9D8B030D-6E8A-4147-A177-3AD203B41FA5}">
                       <a16:colId xmlns:a16="http://schemas.microsoft.com/office/drawing/2014/main" val="3685768401"/>
                     </a:ext>
                   </a:extLst>
                 </a:gridCol>
-                <a:gridCol w="1072097">
+                <a:gridCol w="922097">
                   <a:extLst>
                     <a:ext uri="{9D8B030D-6E8A-4147-A177-3AD203B41FA5}">
                       <a16:colId xmlns:a16="http://schemas.microsoft.com/office/drawing/2014/main" val="3601507115"/>
                     </a:ext>
                   </a:extLst>
                 </a:gridCol>
-                <a:gridCol w="1072097">
+                <a:gridCol w="1222097">
                   <a:extLst>
                     <a:ext uri="{9D8B030D-6E8A-4147-A177-3AD203B41FA5}">
                       <a16:colId xmlns:a16="http://schemas.microsoft.com/office/drawing/2014/main" val="2233393087"/>
@@ -8469,122 +8176,6 @@
           </a:graphicData>
         </a:graphic>
       </p:graphicFrame>
-      <p:sp>
-        <p:nvSpPr>
-          <p:cNvPr id="11" name="文本框 10">
-            <a:extLst>
-              <a:ext uri="{FF2B5EF4-FFF2-40B4-BE49-F238E27FC236}">
-                <a16:creationId xmlns:a16="http://schemas.microsoft.com/office/drawing/2014/main" id="{30F0970B-47A5-D306-9A89-16794956F88F}"/>
-              </a:ext>
-            </a:extLst>
-          </p:cNvPr>
-          <p:cNvSpPr txBox="1"/>
-          <p:nvPr/>
-        </p:nvSpPr>
-        <p:spPr>
-          <a:xfrm>
-            <a:off x="4942626" y="7629372"/>
-            <a:ext cx="1031051" cy="369332"/>
-          </a:xfrm>
-          <a:prstGeom prst="rect">
-            <a:avLst/>
-          </a:prstGeom>
-          <a:noFill/>
-        </p:spPr>
-        <p:txBody>
-          <a:bodyPr wrap="none" rtlCol="0">
-            <a:spAutoFit/>
-          </a:bodyPr>
-          <a:lstStyle/>
-          <a:p>
-            <a:pPr defTabSz="457200" eaLnBrk="1" fontAlgn="auto" hangingPunct="1">
-              <a:spcBef>
-                <a:spcPts val="0"/>
-              </a:spcBef>
-              <a:spcAft>
-                <a:spcPts val="0"/>
-              </a:spcAft>
-            </a:pPr>
-            <a:r>
-              <a:rPr lang="en-US" altLang="zh-CN" b="0" dirty="0">
-                <a:solidFill>
-                  <a:srgbClr val="000000"/>
-                </a:solidFill>
-                <a:latin typeface="Arial" panose="020B0604020202020204"/>
-                <a:ea typeface="黑体" panose="02010609060101010101" pitchFamily="49" charset="-122"/>
-                <a:cs typeface="+mn-cs"/>
-              </a:rPr>
-              <a:t>B arrival</a:t>
-            </a:r>
-            <a:endParaRPr lang="en-US" b="0" dirty="0">
-              <a:solidFill>
-                <a:srgbClr val="000000"/>
-              </a:solidFill>
-              <a:latin typeface="Arial" panose="020B0604020202020204"/>
-              <a:ea typeface="+mn-ea"/>
-              <a:cs typeface="+mn-cs"/>
-            </a:endParaRPr>
-          </a:p>
-        </p:txBody>
-      </p:sp>
-      <p:sp>
-        <p:nvSpPr>
-          <p:cNvPr id="42" name="文本框 10">
-            <a:extLst>
-              <a:ext uri="{FF2B5EF4-FFF2-40B4-BE49-F238E27FC236}">
-                <a16:creationId xmlns:a16="http://schemas.microsoft.com/office/drawing/2014/main" id="{84A9D2B7-C986-0478-DB39-9322737E146A}"/>
-              </a:ext>
-            </a:extLst>
-          </p:cNvPr>
-          <p:cNvSpPr txBox="1"/>
-          <p:nvPr/>
-        </p:nvSpPr>
-        <p:spPr>
-          <a:xfrm>
-            <a:off x="5944367" y="7629372"/>
-            <a:ext cx="1043876" cy="369332"/>
-          </a:xfrm>
-          <a:prstGeom prst="rect">
-            <a:avLst/>
-          </a:prstGeom>
-          <a:noFill/>
-        </p:spPr>
-        <p:txBody>
-          <a:bodyPr wrap="none" rtlCol="0">
-            <a:spAutoFit/>
-          </a:bodyPr>
-          <a:lstStyle/>
-          <a:p>
-            <a:pPr defTabSz="457200" eaLnBrk="1" fontAlgn="auto" hangingPunct="1">
-              <a:spcBef>
-                <a:spcPts val="0"/>
-              </a:spcBef>
-              <a:spcAft>
-                <a:spcPts val="0"/>
-              </a:spcAft>
-            </a:pPr>
-            <a:r>
-              <a:rPr lang="en-US" altLang="zh-CN" b="0" dirty="0">
-                <a:solidFill>
-                  <a:srgbClr val="000000"/>
-                </a:solidFill>
-                <a:latin typeface="Arial" panose="020B0604020202020204"/>
-                <a:ea typeface="黑体" panose="02010609060101010101" pitchFamily="49" charset="-122"/>
-                <a:cs typeface="+mn-cs"/>
-              </a:rPr>
-              <a:t>C arrival</a:t>
-            </a:r>
-            <a:endParaRPr lang="en-US" b="0" dirty="0">
-              <a:solidFill>
-                <a:srgbClr val="000000"/>
-              </a:solidFill>
-              <a:latin typeface="Arial" panose="020B0604020202020204"/>
-              <a:ea typeface="+mn-ea"/>
-              <a:cs typeface="+mn-cs"/>
-            </a:endParaRPr>
-          </a:p>
-        </p:txBody>
-      </p:sp>
       <p:graphicFrame>
         <p:nvGraphicFramePr>
           <p:cNvPr id="32" name="Table 31">
@@ -9712,115 +9303,6 @@
     <a:masterClrMapping/>
   </p:clrMapOvr>
   <p:transition/>
-  <p:timing>
-    <p:tnLst>
-      <p:par>
-        <p:cTn id="1" dur="indefinite" restart="never" nodeType="tmRoot">
-          <p:childTnLst>
-            <p:seq concurrent="1" nextAc="seek">
-              <p:cTn id="2" dur="indefinite" nodeType="mainSeq">
-                <p:childTnLst>
-                  <p:par>
-                    <p:cTn id="3" fill="hold">
-                      <p:stCondLst>
-                        <p:cond delay="indefinite"/>
-                        <p:cond evt="onBegin" delay="0">
-                          <p:tn val="2"/>
-                        </p:cond>
-                      </p:stCondLst>
-                      <p:childTnLst>
-                        <p:par>
-                          <p:cTn id="4" fill="hold">
-                            <p:stCondLst>
-                              <p:cond delay="0"/>
-                            </p:stCondLst>
-                            <p:childTnLst>
-                              <p:par>
-                                <p:cTn id="5" presetID="1" presetClass="entr" presetSubtype="0" fill="hold" grpId="0" nodeType="withEffect">
-                                  <p:stCondLst>
-                                    <p:cond delay="0"/>
-                                  </p:stCondLst>
-                                  <p:childTnLst>
-                                    <p:set>
-                                      <p:cBhvr>
-                                        <p:cTn id="6" dur="1" fill="hold">
-                                          <p:stCondLst>
-                                            <p:cond delay="0"/>
-                                          </p:stCondLst>
-                                        </p:cTn>
-                                        <p:tgtEl>
-                                          <p:spTgt spid="11"/>
-                                        </p:tgtEl>
-                                        <p:attrNameLst>
-                                          <p:attrName>style.visibility</p:attrName>
-                                        </p:attrNameLst>
-                                      </p:cBhvr>
-                                      <p:to>
-                                        <p:strVal val="visible"/>
-                                      </p:to>
-                                    </p:set>
-                                  </p:childTnLst>
-                                </p:cTn>
-                              </p:par>
-                              <p:par>
-                                <p:cTn id="7" presetID="1" presetClass="entr" presetSubtype="0" fill="hold" grpId="0" nodeType="withEffect">
-                                  <p:stCondLst>
-                                    <p:cond delay="0"/>
-                                  </p:stCondLst>
-                                  <p:childTnLst>
-                                    <p:set>
-                                      <p:cBhvr>
-                                        <p:cTn id="8" dur="1" fill="hold">
-                                          <p:stCondLst>
-                                            <p:cond delay="0"/>
-                                          </p:stCondLst>
-                                        </p:cTn>
-                                        <p:tgtEl>
-                                          <p:spTgt spid="42"/>
-                                        </p:tgtEl>
-                                        <p:attrNameLst>
-                                          <p:attrName>style.visibility</p:attrName>
-                                        </p:attrNameLst>
-                                      </p:cBhvr>
-                                      <p:to>
-                                        <p:strVal val="visible"/>
-                                      </p:to>
-                                    </p:set>
-                                  </p:childTnLst>
-                                </p:cTn>
-                              </p:par>
-                            </p:childTnLst>
-                          </p:cTn>
-                        </p:par>
-                      </p:childTnLst>
-                    </p:cTn>
-                  </p:par>
-                </p:childTnLst>
-              </p:cTn>
-              <p:prevCondLst>
-                <p:cond evt="onPrev" delay="0">
-                  <p:tgtEl>
-                    <p:sldTgt/>
-                  </p:tgtEl>
-                </p:cond>
-              </p:prevCondLst>
-              <p:nextCondLst>
-                <p:cond evt="onNext" delay="0">
-                  <p:tgtEl>
-                    <p:sldTgt/>
-                  </p:tgtEl>
-                </p:cond>
-              </p:nextCondLst>
-            </p:seq>
-          </p:childTnLst>
-        </p:cTn>
-      </p:par>
-    </p:tnLst>
-    <p:bldLst>
-      <p:bldP spid="11" grpId="0"/>
-      <p:bldP spid="42" grpId="0"/>
-    </p:bldLst>
-  </p:timing>
 </p:sld>
 </file>
 
@@ -9898,7 +9380,7 @@
           <a:p>
             <a:r>
               <a:rPr lang="en-GB" dirty="0"/>
-              <a:t>Consider the set of 3 processes whose arrival time and CPU/IO burst times are given below. If the CPU scheduling policy is </a:t>
+              <a:t>Consider the set of 3 processes whose arrival time and CPU burst times are given below. If the CPU scheduling policy is </a:t>
             </a:r>
             <a:r>
               <a:rPr lang="en-GB" b="1" dirty="0"/>
@@ -9927,8 +9409,8 @@
           <p:nvPr/>
         </p:nvGraphicFramePr>
         <p:xfrm>
-          <a:off x="4191000" y="2362200"/>
-          <a:ext cx="4057622" cy="2377440"/>
+          <a:off x="3911287" y="2362200"/>
+          <a:ext cx="4337335" cy="2377440"/>
         </p:xfrm>
         <a:graphic>
           <a:graphicData uri="http://schemas.openxmlformats.org/drawingml/2006/table">
@@ -9937,7 +9419,7 @@
                 <a:tableStyleId>{5C22544A-7EE6-4342-B048-85BDC9FD1C3A}</a:tableStyleId>
               </a:tblPr>
               <a:tblGrid>
-                <a:gridCol w="320287">
+                <a:gridCol w="600000">
                   <a:extLst>
                     <a:ext uri="{9D8B030D-6E8A-4147-A177-3AD203B41FA5}">
                       <a16:colId xmlns:a16="http://schemas.microsoft.com/office/drawing/2014/main" val="3897766631"/>
@@ -10697,7 +10179,7 @@
           <a:p>
             <a:r>
               <a:rPr lang="en-GB" dirty="0"/>
-              <a:t>Consider the set of 4 processes whose arrival time and CPU/IO burst times are given below. If the CPU scheduling policy is </a:t>
+              <a:t>Consider the set of 3 processes whose arrival time and CPU/IO burst times are given below. If the CPU scheduling policy is </a:t>
             </a:r>
             <a:r>
               <a:rPr lang="en-GB" b="1" dirty="0"/>
@@ -10705,7 +10187,7 @@
             </a:r>
             <a:r>
               <a:rPr lang="en-GB" dirty="0"/>
-              <a:t>, draw the Gantt chart and calculate the average response time. (Note: consider the overlap of computation and IO busts of different processes)</a:t>
+              <a:t>, draw the Gantt chart and calculate the average response time. (Note: consider the overlap of computation and IO bursts of different processes)</a:t>
             </a:r>
             <a:endParaRPr lang="en-SE" dirty="0"/>
           </a:p>
@@ -10732,8 +10214,8 @@
           </p:nvPr>
         </p:nvGraphicFramePr>
         <p:xfrm>
-          <a:off x="3920556" y="3276600"/>
-          <a:ext cx="4350887" cy="2377440"/>
+          <a:off x="3640843" y="3276600"/>
+          <a:ext cx="4630600" cy="2377440"/>
         </p:xfrm>
         <a:graphic>
           <a:graphicData uri="http://schemas.openxmlformats.org/drawingml/2006/table">
@@ -10742,7 +10224,7 @@
                 <a:tableStyleId>{5C22544A-7EE6-4342-B048-85BDC9FD1C3A}</a:tableStyleId>
               </a:tblPr>
               <a:tblGrid>
-                <a:gridCol w="320287">
+                <a:gridCol w="600000">
                   <a:extLst>
                     <a:ext uri="{9D8B030D-6E8A-4147-A177-3AD203B41FA5}">
                       <a16:colId xmlns:a16="http://schemas.microsoft.com/office/drawing/2014/main" val="3897766631"/>
@@ -11513,7 +10995,7 @@
           <a:p>
             <a:r>
               <a:rPr lang="en-GB" dirty="0"/>
-              <a:t>Consider the set of 4 processes whose arrival time and CPU/IO burst times are given below. If the CPU scheduling policy is </a:t>
+              <a:t>Consider the set of 3 processes whose arrival time and CPU/IO burst times are given below. If the CPU scheduling policy is </a:t>
             </a:r>
             <a:r>
               <a:rPr lang="en-GB" b="1" dirty="0"/>
@@ -11542,8 +11024,8 @@
           <p:nvPr/>
         </p:nvGraphicFramePr>
         <p:xfrm>
-          <a:off x="3384508" y="2667000"/>
-          <a:ext cx="5422984" cy="2377440"/>
+          <a:off x="3104795" y="2667000"/>
+          <a:ext cx="5702697" cy="2377440"/>
         </p:xfrm>
         <a:graphic>
           <a:graphicData uri="http://schemas.openxmlformats.org/drawingml/2006/table">
@@ -11552,7 +11034,7 @@
                 <a:tableStyleId>{5C22544A-7EE6-4342-B048-85BDC9FD1C3A}</a:tableStyleId>
               </a:tblPr>
               <a:tblGrid>
-                <a:gridCol w="320287">
+                <a:gridCol w="600000">
                   <a:extLst>
                     <a:ext uri="{9D8B030D-6E8A-4147-A177-3AD203B41FA5}">
                       <a16:colId xmlns:a16="http://schemas.microsoft.com/office/drawing/2014/main" val="3897766631"/>
@@ -12566,7 +12048,7 @@
         <a:effectLst/>
         <a:extLst>
           <a:ext uri="{AF507438-7753-43e0-B8FC-AC1667EBCBE1}">
-            <a14:hiddenEffects xmlns="" xmlns:a14="http://schemas.microsoft.com/office/drawing/2010/main">
+            <a14:hiddenEffects xmlns:a14="http://schemas.microsoft.com/office/drawing/2010/main" xmlns="">
               <a:effectLst>
                 <a:outerShdw dist="35921" dir="2700000" algn="ctr" rotWithShape="0">
                   <a:schemeClr val="bg2"/>
@@ -12639,7 +12121,7 @@
         <a:effectLst/>
         <a:extLst>
           <a:ext uri="{AF507438-7753-43e0-B8FC-AC1667EBCBE1}">
-            <a14:hiddenEffects xmlns="" xmlns:a14="http://schemas.microsoft.com/office/drawing/2010/main">
+            <a14:hiddenEffects xmlns:a14="http://schemas.microsoft.com/office/drawing/2010/main" xmlns="">
               <a:effectLst>
                 <a:outerShdw dist="35921" dir="2700000" algn="ctr" rotWithShape="0">
                   <a:schemeClr val="bg2"/>

--- a/PPTs/L5-Exercises.pptx
+++ b/PPTs/L5-Exercises.pptx
@@ -215,14 +215,14 @@
           <a:effectLst/>
           <a:extLst>
             <a:ext uri="{909E8E84-426E-40dd-AFC4-6F175D3DCCD1}">
-              <a14:hiddenFill xmlns:a14="http://schemas.microsoft.com/office/drawing/2010/main" xmlns="">
+              <a14:hiddenFill xmlns="" xmlns:a14="http://schemas.microsoft.com/office/drawing/2010/main">
                 <a:solidFill>
                   <a:schemeClr val="bg1"/>
                 </a:solidFill>
               </a14:hiddenFill>
             </a:ext>
             <a:ext uri="{91240B29-F687-4f45-9708-019B960494DF}">
-              <a14:hiddenLine xmlns:a14="http://schemas.microsoft.com/office/drawing/2010/main" xmlns="" w="12700">
+              <a14:hiddenLine xmlns="" xmlns:a14="http://schemas.microsoft.com/office/drawing/2010/main" w="12700">
                 <a:pattFill prst="narHorz">
                   <a:fgClr>
                     <a:schemeClr val="tx1"/>
@@ -237,7 +237,7 @@
               </a14:hiddenLine>
             </a:ext>
             <a:ext uri="{AF507438-7753-43e0-B8FC-AC1667EBCBE1}">
-              <a14:hiddenEffects xmlns:a14="http://schemas.microsoft.com/office/drawing/2010/main" xmlns="">
+              <a14:hiddenEffects xmlns="" xmlns:a14="http://schemas.microsoft.com/office/drawing/2010/main">
                 <a:effectLst>
                   <a:outerShdw dist="35921" dir="2700000" algn="ctr" rotWithShape="0">
                     <a:schemeClr val="bg2"/>
@@ -343,14 +343,14 @@
           <a:effectLst/>
           <a:extLst>
             <a:ext uri="{909E8E84-426E-40dd-AFC4-6F175D3DCCD1}">
-              <a14:hiddenFill xmlns:a14="http://schemas.microsoft.com/office/drawing/2010/main" xmlns="">
+              <a14:hiddenFill xmlns="" xmlns:a14="http://schemas.microsoft.com/office/drawing/2010/main">
                 <a:solidFill>
                   <a:schemeClr val="bg1"/>
                 </a:solidFill>
               </a14:hiddenFill>
             </a:ext>
             <a:ext uri="{91240B29-F687-4f45-9708-019B960494DF}">
-              <a14:hiddenLine xmlns:a14="http://schemas.microsoft.com/office/drawing/2010/main" xmlns="" w="12700">
+              <a14:hiddenLine xmlns="" xmlns:a14="http://schemas.microsoft.com/office/drawing/2010/main" w="12700">
                 <a:pattFill prst="narHorz">
                   <a:fgClr>
                     <a:schemeClr val="tx1"/>
@@ -365,7 +365,7 @@
               </a14:hiddenLine>
             </a:ext>
             <a:ext uri="{AF507438-7753-43e0-B8FC-AC1667EBCBE1}">
-              <a14:hiddenEffects xmlns:a14="http://schemas.microsoft.com/office/drawing/2010/main" xmlns="">
+              <a14:hiddenEffects xmlns="" xmlns:a14="http://schemas.microsoft.com/office/drawing/2010/main">
                 <a:effectLst>
                   <a:outerShdw dist="35921" dir="2700000" algn="ctr" rotWithShape="0">
                     <a:schemeClr val="bg2"/>
@@ -433,17 +433,17 @@
           <a:effectLst/>
           <a:extLst>
             <a:ext uri="{FAA26D3D-D897-4be2-8F04-BA451C77F1D7}">
-              <ma14:placeholderFlag xmlns:ma14="http://schemas.microsoft.com/office/mac/drawingml/2011/main" xmlns="" val="1"/>
+              <ma14:placeholderFlag xmlns="" xmlns:ma14="http://schemas.microsoft.com/office/mac/drawingml/2011/main" val="1"/>
             </a:ext>
             <a:ext uri="{909E8E84-426E-40dd-AFC4-6F175D3DCCD1}">
-              <a14:hiddenFill xmlns:a14="http://schemas.microsoft.com/office/drawing/2010/main" xmlns="">
+              <a14:hiddenFill xmlns="" xmlns:a14="http://schemas.microsoft.com/office/drawing/2010/main">
                 <a:solidFill>
                   <a:srgbClr val="FFFFFF"/>
                 </a:solidFill>
               </a14:hiddenFill>
             </a:ext>
             <a:ext uri="{AF507438-7753-43e0-B8FC-AC1667EBCBE1}">
-              <a14:hiddenEffects xmlns:a14="http://schemas.microsoft.com/office/drawing/2010/main" xmlns="">
+              <a14:hiddenEffects xmlns="" xmlns:a14="http://schemas.microsoft.com/office/drawing/2010/main">
                 <a:effectLst>
                   <a:outerShdw blurRad="63500" dist="38099" dir="2700000" algn="ctr" rotWithShape="0">
                     <a:srgbClr val="000000">
@@ -454,7 +454,7 @@
               </a14:hiddenEffects>
             </a:ext>
             <a:ext uri="{53640926-AAD7-44d8-BBD7-CCE9431645EC}">
-              <a14:shadowObscured xmlns:a14="http://schemas.microsoft.com/office/drawing/2010/main" xmlns="" val="1"/>
+              <a14:shadowObscured xmlns="" xmlns:a14="http://schemas.microsoft.com/office/drawing/2010/main" val="1"/>
             </a:ext>
           </a:extLst>
         </p:spPr>
@@ -484,14 +484,14 @@
           <a:effectLst/>
           <a:extLst>
             <a:ext uri="{909E8E84-426E-40dd-AFC4-6F175D3DCCD1}">
-              <a14:hiddenFill xmlns:a14="http://schemas.microsoft.com/office/drawing/2010/main" xmlns="">
+              <a14:hiddenFill xmlns="" xmlns:a14="http://schemas.microsoft.com/office/drawing/2010/main">
                 <a:solidFill>
                   <a:schemeClr val="bg1"/>
                 </a:solidFill>
               </a14:hiddenFill>
             </a:ext>
             <a:ext uri="{91240B29-F687-4f45-9708-019B960494DF}">
-              <a14:hiddenLine xmlns:a14="http://schemas.microsoft.com/office/drawing/2010/main" xmlns="" w="12700">
+              <a14:hiddenLine xmlns="" xmlns:a14="http://schemas.microsoft.com/office/drawing/2010/main" w="12700">
                 <a:pattFill prst="narHorz">
                   <a:fgClr>
                     <a:schemeClr val="tx1"/>
@@ -506,7 +506,7 @@
               </a14:hiddenLine>
             </a:ext>
             <a:ext uri="{AF507438-7753-43e0-B8FC-AC1667EBCBE1}">
-              <a14:hiddenEffects xmlns:a14="http://schemas.microsoft.com/office/drawing/2010/main" xmlns="">
+              <a14:hiddenEffects xmlns="" xmlns:a14="http://schemas.microsoft.com/office/drawing/2010/main">
                 <a:effectLst>
                   <a:outerShdw dist="35921" dir="2700000" algn="ctr" rotWithShape="0">
                     <a:schemeClr val="bg2"/>
@@ -756,10 +756,10 @@
         <p:spPr>
           <a:extLst>
             <a:ext uri="{FAA26D3D-D897-4be2-8F04-BA451C77F1D7}">
-              <ma14:placeholderFlag xmlns:ma14="http://schemas.microsoft.com/office/mac/drawingml/2011/main" xmlns="" val="1"/>
+              <ma14:placeholderFlag xmlns="" xmlns:ma14="http://schemas.microsoft.com/office/mac/drawingml/2011/main" val="1"/>
             </a:ext>
             <a:ext uri="{AF507438-7753-43e0-B8FC-AC1667EBCBE1}">
-              <a14:hiddenEffects xmlns:a14="http://schemas.microsoft.com/office/drawing/2010/main" xmlns="">
+              <a14:hiddenEffects xmlns="" xmlns:a14="http://schemas.microsoft.com/office/drawing/2010/main">
                 <a:effectLst>
                   <a:outerShdw blurRad="63500" dist="38099" dir="2700000" algn="ctr" rotWithShape="0">
                     <a:schemeClr val="bg2">
@@ -2828,17 +2828,17 @@
           <a:effectLst/>
           <a:extLst>
             <a:ext uri="{FAA26D3D-D897-4be2-8F04-BA451C77F1D7}">
-              <ma14:placeholderFlag xmlns:ma14="http://schemas.microsoft.com/office/mac/drawingml/2011/main" xmlns="" val="1"/>
+              <ma14:placeholderFlag xmlns="" xmlns:ma14="http://schemas.microsoft.com/office/mac/drawingml/2011/main" val="1"/>
             </a:ext>
             <a:ext uri="{909E8E84-426E-40dd-AFC4-6F175D3DCCD1}">
-              <a14:hiddenFill xmlns:a14="http://schemas.microsoft.com/office/drawing/2010/main" xmlns="">
+              <a14:hiddenFill xmlns="" xmlns:a14="http://schemas.microsoft.com/office/drawing/2010/main">
                 <a:solidFill>
                   <a:schemeClr val="bg1"/>
                 </a:solidFill>
               </a14:hiddenFill>
             </a:ext>
             <a:ext uri="{91240B29-F687-4f45-9708-019B960494DF}">
-              <a14:hiddenLine xmlns:a14="http://schemas.microsoft.com/office/drawing/2010/main" xmlns="" w="12700">
+              <a14:hiddenLine xmlns="" xmlns:a14="http://schemas.microsoft.com/office/drawing/2010/main" w="12700">
                 <a:pattFill prst="narHorz">
                   <a:fgClr>
                     <a:schemeClr val="tx1"/>
@@ -2853,7 +2853,7 @@
               </a14:hiddenLine>
             </a:ext>
             <a:ext uri="{AF507438-7753-43e0-B8FC-AC1667EBCBE1}">
-              <a14:hiddenEffects xmlns:a14="http://schemas.microsoft.com/office/drawing/2010/main" xmlns="">
+              <a14:hiddenEffects xmlns="" xmlns:a14="http://schemas.microsoft.com/office/drawing/2010/main">
                 <a:effectLst>
                   <a:outerShdw blurRad="63500" dist="38099" dir="2700000" algn="ctr" rotWithShape="0">
                     <a:schemeClr val="bg2">
@@ -2906,17 +2906,17 @@
           <a:effectLst/>
           <a:extLst>
             <a:ext uri="{FAA26D3D-D897-4be2-8F04-BA451C77F1D7}">
-              <ma14:placeholderFlag xmlns:ma14="http://schemas.microsoft.com/office/mac/drawingml/2011/main" xmlns="" val="1"/>
+              <ma14:placeholderFlag xmlns="" xmlns:ma14="http://schemas.microsoft.com/office/mac/drawingml/2011/main" val="1"/>
             </a:ext>
             <a:ext uri="{909E8E84-426E-40dd-AFC4-6F175D3DCCD1}">
-              <a14:hiddenFill xmlns:a14="http://schemas.microsoft.com/office/drawing/2010/main" xmlns="">
+              <a14:hiddenFill xmlns="" xmlns:a14="http://schemas.microsoft.com/office/drawing/2010/main">
                 <a:solidFill>
                   <a:schemeClr val="bg1"/>
                 </a:solidFill>
               </a14:hiddenFill>
             </a:ext>
             <a:ext uri="{91240B29-F687-4f45-9708-019B960494DF}">
-              <a14:hiddenLine xmlns:a14="http://schemas.microsoft.com/office/drawing/2010/main" xmlns="" w="12700">
+              <a14:hiddenLine xmlns="" xmlns:a14="http://schemas.microsoft.com/office/drawing/2010/main" w="12700">
                 <a:pattFill prst="narHorz">
                   <a:fgClr>
                     <a:schemeClr val="tx1"/>
@@ -2931,7 +2931,7 @@
               </a14:hiddenLine>
             </a:ext>
             <a:ext uri="{AF507438-7753-43e0-B8FC-AC1667EBCBE1}">
-              <a14:hiddenEffects xmlns:a14="http://schemas.microsoft.com/office/drawing/2010/main" xmlns="">
+              <a14:hiddenEffects xmlns="" xmlns:a14="http://schemas.microsoft.com/office/drawing/2010/main">
                 <a:effectLst>
                   <a:outerShdw blurRad="63500" dist="38099" dir="2700000" algn="ctr" rotWithShape="0">
                     <a:schemeClr val="bg2">
@@ -3010,14 +3010,14 @@
           <a:effectLst/>
           <a:extLst>
             <a:ext uri="{909E8E84-426E-40dd-AFC4-6F175D3DCCD1}">
-              <a14:hiddenFill xmlns:a14="http://schemas.microsoft.com/office/drawing/2010/main" xmlns="">
+              <a14:hiddenFill xmlns="" xmlns:a14="http://schemas.microsoft.com/office/drawing/2010/main">
                 <a:solidFill>
                   <a:schemeClr val="bg1"/>
                 </a:solidFill>
               </a14:hiddenFill>
             </a:ext>
             <a:ext uri="{91240B29-F687-4f45-9708-019B960494DF}">
-              <a14:hiddenLine xmlns:a14="http://schemas.microsoft.com/office/drawing/2010/main" xmlns="" w="12700">
+              <a14:hiddenLine xmlns="" xmlns:a14="http://schemas.microsoft.com/office/drawing/2010/main" w="12700">
                 <a:pattFill prst="narHorz">
                   <a:fgClr>
                     <a:schemeClr val="tx1"/>
@@ -3032,7 +3032,7 @@
               </a14:hiddenLine>
             </a:ext>
             <a:ext uri="{AF507438-7753-43e0-B8FC-AC1667EBCBE1}">
-              <a14:hiddenEffects xmlns:a14="http://schemas.microsoft.com/office/drawing/2010/main" xmlns="">
+              <a14:hiddenEffects xmlns="" xmlns:a14="http://schemas.microsoft.com/office/drawing/2010/main">
                 <a:effectLst>
                   <a:outerShdw dist="35921" dir="2700000" algn="ctr" rotWithShape="0">
                     <a:schemeClr val="bg2"/>
@@ -3098,12 +3098,12 @@
           <a:effectLst/>
           <a:extLst>
             <a:ext uri="{909E8E84-426E-40dd-AFC4-6F175D3DCCD1}">
-              <a14:hiddenFill xmlns:a14="http://schemas.microsoft.com/office/drawing/2010/main" xmlns="">
+              <a14:hiddenFill xmlns="" xmlns:a14="http://schemas.microsoft.com/office/drawing/2010/main">
                 <a:noFill/>
               </a14:hiddenFill>
             </a:ext>
             <a:ext uri="{AF507438-7753-43e0-B8FC-AC1667EBCBE1}">
-              <a14:hiddenEffects xmlns:a14="http://schemas.microsoft.com/office/drawing/2010/main" xmlns="">
+              <a14:hiddenEffects xmlns="" xmlns:a14="http://schemas.microsoft.com/office/drawing/2010/main">
                 <a:effectLst>
                   <a:outerShdw blurRad="63500" dist="38099" dir="2700000" algn="ctr" rotWithShape="0">
                     <a:schemeClr val="bg2">
@@ -3840,211 +3840,329 @@
           </a:p>
         </p:txBody>
       </p:sp>
-      <p:sp>
-        <p:nvSpPr>
-          <p:cNvPr id="3" name="Content Placeholder 2">
-            <a:extLst>
-              <a:ext uri="{FF2B5EF4-FFF2-40B4-BE49-F238E27FC236}">
-                <a16:creationId xmlns:a16="http://schemas.microsoft.com/office/drawing/2014/main" id="{A568D32D-8A26-D01F-B9B1-DC028CCAB513}"/>
-              </a:ext>
-            </a:extLst>
-          </p:cNvPr>
-          <p:cNvSpPr>
-            <a:spLocks noGrp="1"/>
-          </p:cNvSpPr>
-          <p:nvPr>
-            <p:ph idx="1"/>
-          </p:nvPr>
-        </p:nvSpPr>
-        <p:spPr/>
-        <p:txBody>
-          <a:bodyPr>
-            <a:normAutofit/>
-          </a:bodyPr>
-          <a:lstStyle/>
-          <a:p>
-            <a:r>
-              <a:rPr lang="en-US" altLang="ko-KR" dirty="0"/>
-              <a:t>Use </a:t>
-            </a:r>
-            <a:r>
-              <a:rPr lang="en-US" altLang="ko-KR" sz="2800" dirty="0"/>
-              <a:t>exponential averaging  </a:t>
-            </a:r>
-            <a:r>
-              <a:rPr lang="en-US" altLang="ko-KR" sz="2800" dirty="0">
-                <a:sym typeface="Symbol" panose="05050102010706020507" pitchFamily="18" charset="2"/>
-              </a:rPr>
-              <a:t></a:t>
-            </a:r>
-            <a:r>
-              <a:rPr lang="en-US" altLang="ko-KR" sz="2800" baseline="-25000" dirty="0">
-                <a:sym typeface="Symbol" panose="05050102010706020507" pitchFamily="18" charset="2"/>
-              </a:rPr>
-              <a:t>n</a:t>
-            </a:r>
-            <a:r>
-              <a:rPr lang="en-US" altLang="ko-KR" sz="2800" dirty="0">
-                <a:sym typeface="Symbol" panose="05050102010706020507" pitchFamily="18" charset="2"/>
-              </a:rPr>
-              <a:t> = t</a:t>
-            </a:r>
-            <a:r>
-              <a:rPr lang="en-US" altLang="ko-KR" sz="2800" baseline="-25000" dirty="0">
-                <a:sym typeface="Symbol" panose="05050102010706020507" pitchFamily="18" charset="2"/>
-              </a:rPr>
-              <a:t>n-1</a:t>
-            </a:r>
-            <a:r>
-              <a:rPr lang="en-US" altLang="ko-KR" sz="2800" dirty="0">
-                <a:sym typeface="Symbol" panose="05050102010706020507" pitchFamily="18" charset="2"/>
-              </a:rPr>
-              <a:t>+(1-)</a:t>
-            </a:r>
-            <a:r>
-              <a:rPr lang="en-US" altLang="ko-KR" sz="2800" baseline="-25000" dirty="0">
-                <a:sym typeface="Symbol" panose="05050102010706020507" pitchFamily="18" charset="2"/>
-              </a:rPr>
-              <a:t>n-1</a:t>
-            </a:r>
-            <a:r>
-              <a:rPr lang="en-US" altLang="ko-KR" sz="2800" dirty="0">
-                <a:sym typeface="Symbol" panose="05050102010706020507" pitchFamily="18" charset="2"/>
-              </a:rPr>
-              <a:t> to predict the next burst time. Assume initial estimate </a:t>
-            </a:r>
-            <a:r>
-              <a:rPr lang="en-US" altLang="ko-KR" sz="2800" baseline="-25000" dirty="0">
-                <a:sym typeface="Symbol" panose="05050102010706020507" pitchFamily="18" charset="2"/>
-              </a:rPr>
-              <a:t>0</a:t>
-            </a:r>
-            <a:r>
-              <a:rPr lang="en-US" altLang="ko-KR" sz="2800" dirty="0">
-                <a:sym typeface="Symbol" panose="05050102010706020507" pitchFamily="18" charset="2"/>
-              </a:rPr>
-              <a:t> = 10, and the </a:t>
-            </a:r>
-            <a:r>
-              <a:rPr lang="en-GB" dirty="0"/>
-              <a:t>actual burst times of the first four processes </a:t>
-            </a:r>
-            <a:r>
-              <a:rPr lang="en-US" altLang="ko-KR" sz="2800" dirty="0">
-                <a:sym typeface="Symbol" panose="05050102010706020507" pitchFamily="18" charset="2"/>
-              </a:rPr>
-              <a:t>t</a:t>
-            </a:r>
-            <a:r>
-              <a:rPr lang="en-US" altLang="ko-KR" sz="2800" baseline="-25000" dirty="0">
-                <a:sym typeface="Symbol" panose="05050102010706020507" pitchFamily="18" charset="2"/>
-              </a:rPr>
-              <a:t>0</a:t>
-            </a:r>
-            <a:r>
-              <a:rPr lang="en-GB" dirty="0"/>
-              <a:t>, </a:t>
-            </a:r>
-            <a:r>
-              <a:rPr lang="en-US" altLang="ko-KR" sz="2800" dirty="0">
-                <a:sym typeface="Symbol" panose="05050102010706020507" pitchFamily="18" charset="2"/>
-              </a:rPr>
-              <a:t>t</a:t>
-            </a:r>
-            <a:r>
-              <a:rPr lang="en-US" altLang="ko-KR" sz="2800" baseline="-25000" dirty="0">
-                <a:sym typeface="Symbol" panose="05050102010706020507" pitchFamily="18" charset="2"/>
-              </a:rPr>
-              <a:t>1</a:t>
-            </a:r>
-            <a:r>
-              <a:rPr lang="en-GB" dirty="0"/>
-              <a:t>, </a:t>
-            </a:r>
-            <a:r>
-              <a:rPr lang="en-US" altLang="ko-KR" sz="2800" dirty="0">
-                <a:sym typeface="Symbol" panose="05050102010706020507" pitchFamily="18" charset="2"/>
-              </a:rPr>
-              <a:t>t</a:t>
-            </a:r>
-            <a:r>
-              <a:rPr lang="en-US" altLang="ko-KR" sz="2800" baseline="-25000" dirty="0">
-                <a:sym typeface="Symbol" panose="05050102010706020507" pitchFamily="18" charset="2"/>
-              </a:rPr>
-              <a:t>2</a:t>
-            </a:r>
-            <a:r>
-              <a:rPr lang="en-GB" dirty="0"/>
-              <a:t>, </a:t>
-            </a:r>
-            <a:r>
-              <a:rPr lang="en-US" altLang="ko-KR" sz="2800" dirty="0">
-                <a:sym typeface="Symbol" panose="05050102010706020507" pitchFamily="18" charset="2"/>
-              </a:rPr>
-              <a:t>t</a:t>
-            </a:r>
-            <a:r>
-              <a:rPr lang="en-US" altLang="ko-KR" sz="2800" baseline="-25000" dirty="0">
-                <a:sym typeface="Symbol" panose="05050102010706020507" pitchFamily="18" charset="2"/>
-              </a:rPr>
-              <a:t>3</a:t>
-            </a:r>
-            <a:r>
-              <a:rPr lang="en-GB" dirty="0"/>
-              <a:t> are 4, 8, 6 and 7, respectively. Given α = 0.5. Compute the predicted burst times </a:t>
-            </a:r>
-            <a:r>
-              <a:rPr lang="en-US" altLang="ko-KR" sz="2800" dirty="0">
-                <a:sym typeface="Symbol" panose="05050102010706020507" pitchFamily="18" charset="2"/>
-              </a:rPr>
-              <a:t></a:t>
-            </a:r>
-            <a:r>
-              <a:rPr lang="en-US" altLang="ko-KR" sz="2800" baseline="-25000" dirty="0">
-                <a:sym typeface="Symbol" panose="05050102010706020507" pitchFamily="18" charset="2"/>
-              </a:rPr>
-              <a:t>1</a:t>
-            </a:r>
-            <a:r>
-              <a:rPr lang="en-US" altLang="ko-KR" sz="2800" dirty="0">
-                <a:sym typeface="Symbol" panose="05050102010706020507" pitchFamily="18" charset="2"/>
-              </a:rPr>
-              <a:t>, </a:t>
-            </a:r>
-            <a:r>
-              <a:rPr lang="en-US" altLang="ko-KR" sz="2800" baseline="-25000" dirty="0">
-                <a:sym typeface="Symbol" panose="05050102010706020507" pitchFamily="18" charset="2"/>
-              </a:rPr>
-              <a:t>2</a:t>
-            </a:r>
-            <a:r>
-              <a:rPr lang="en-US" altLang="ko-KR" sz="2800" dirty="0">
-                <a:sym typeface="Symbol" panose="05050102010706020507" pitchFamily="18" charset="2"/>
-              </a:rPr>
-              <a:t>, </a:t>
-            </a:r>
-            <a:r>
-              <a:rPr lang="en-US" altLang="ko-KR" sz="2800" baseline="-25000" dirty="0">
-                <a:sym typeface="Symbol" panose="05050102010706020507" pitchFamily="18" charset="2"/>
-              </a:rPr>
-              <a:t>3</a:t>
-            </a:r>
-            <a:r>
-              <a:rPr lang="en-US" altLang="ko-KR" sz="2800" dirty="0">
-                <a:sym typeface="Symbol" panose="05050102010706020507" pitchFamily="18" charset="2"/>
-              </a:rPr>
-              <a:t>, </a:t>
-            </a:r>
-            <a:r>
-              <a:rPr lang="en-US" altLang="ko-KR" sz="2800" baseline="-25000" dirty="0">
-                <a:sym typeface="Symbol" panose="05050102010706020507" pitchFamily="18" charset="2"/>
-              </a:rPr>
-              <a:t>4. </a:t>
-            </a:r>
-            <a:endParaRPr lang="en-GB" dirty="0"/>
-          </a:p>
-        </p:txBody>
-      </p:sp>
+      <mc:AlternateContent xmlns:mc="http://schemas.openxmlformats.org/markup-compatibility/2006">
+        <mc:Choice xmlns:a14="http://schemas.microsoft.com/office/drawing/2010/main" Requires="a14">
+          <p:sp>
+            <p:nvSpPr>
+              <p:cNvPr id="3" name="Content Placeholder 2">
+                <a:extLst>
+                  <a:ext uri="{FF2B5EF4-FFF2-40B4-BE49-F238E27FC236}">
+                    <a16:creationId xmlns:a16="http://schemas.microsoft.com/office/drawing/2014/main" id="{A568D32D-8A26-D01F-B9B1-DC028CCAB513}"/>
+                  </a:ext>
+                </a:extLst>
+              </p:cNvPr>
+              <p:cNvSpPr>
+                <a:spLocks noGrp="1"/>
+              </p:cNvSpPr>
+              <p:nvPr>
+                <p:ph idx="1"/>
+              </p:nvPr>
+            </p:nvSpPr>
+            <p:spPr/>
+            <p:txBody>
+              <a:bodyPr>
+                <a:normAutofit/>
+              </a:bodyPr>
+              <a:lstStyle/>
+              <a:p>
+                <a:r>
+                  <a:rPr lang="en-US" altLang="ko-KR" dirty="0"/>
+                  <a:t>Use exponential averaging </a:t>
+                </a:r>
+                <a14:m>
+                  <m:oMath xmlns:m="http://schemas.openxmlformats.org/officeDocument/2006/math">
+                    <m:sSub>
+                      <m:sSubPr>
+                        <m:ctrlPr>
+                          <a:rPr lang="en-US" altLang="zh-CN" i="1">
+                            <a:latin typeface="Cambria Math" panose="02040503050406030204" pitchFamily="18" charset="0"/>
+                          </a:rPr>
+                        </m:ctrlPr>
+                      </m:sSubPr>
+                      <m:e>
+                        <m:r>
+                          <a:rPr lang="en-US" altLang="zh-CN" i="1">
+                            <a:latin typeface="Cambria Math" panose="02040503050406030204" pitchFamily="18" charset="0"/>
+                          </a:rPr>
+                          <m:t>𝜏</m:t>
+                        </m:r>
+                      </m:e>
+                      <m:sub>
+                        <m:r>
+                          <a:rPr lang="en-US" altLang="zh-CN" i="1">
+                            <a:latin typeface="Cambria Math" panose="02040503050406030204" pitchFamily="18" charset="0"/>
+                          </a:rPr>
+                          <m:t>𝑛</m:t>
+                        </m:r>
+                        <m:r>
+                          <a:rPr lang="en-US" altLang="zh-CN" i="1">
+                            <a:latin typeface="Cambria Math" panose="02040503050406030204" pitchFamily="18" charset="0"/>
+                          </a:rPr>
+                          <m:t>+1</m:t>
+                        </m:r>
+                      </m:sub>
+                    </m:sSub>
+                    <m:r>
+                      <a:rPr lang="en-US" altLang="zh-CN" i="1">
+                        <a:latin typeface="Cambria Math" panose="02040503050406030204" pitchFamily="18" charset="0"/>
+                      </a:rPr>
+                      <m:t>=</m:t>
+                    </m:r>
+                    <m:r>
+                      <a:rPr lang="en-US" altLang="zh-CN" i="1">
+                        <a:latin typeface="Cambria Math" panose="02040503050406030204" pitchFamily="18" charset="0"/>
+                      </a:rPr>
+                      <m:t>𝛼</m:t>
+                    </m:r>
+                    <m:sSub>
+                      <m:sSubPr>
+                        <m:ctrlPr>
+                          <a:rPr lang="en-US" altLang="zh-CN" i="1">
+                            <a:latin typeface="Cambria Math" panose="02040503050406030204" pitchFamily="18" charset="0"/>
+                          </a:rPr>
+                        </m:ctrlPr>
+                      </m:sSubPr>
+                      <m:e>
+                        <m:r>
+                          <a:rPr lang="en-US" altLang="zh-CN" i="1">
+                            <a:latin typeface="Cambria Math" panose="02040503050406030204" pitchFamily="18" charset="0"/>
+                          </a:rPr>
+                          <m:t>𝑡</m:t>
+                        </m:r>
+                      </m:e>
+                      <m:sub>
+                        <m:r>
+                          <a:rPr lang="en-US" altLang="zh-CN" i="1">
+                            <a:latin typeface="Cambria Math" panose="02040503050406030204" pitchFamily="18" charset="0"/>
+                          </a:rPr>
+                          <m:t>𝑛</m:t>
+                        </m:r>
+                      </m:sub>
+                    </m:sSub>
+                    <m:r>
+                      <a:rPr lang="en-US" altLang="zh-CN" i="1">
+                        <a:latin typeface="Cambria Math" panose="02040503050406030204" pitchFamily="18" charset="0"/>
+                      </a:rPr>
+                      <m:t>+(1−</m:t>
+                    </m:r>
+                    <m:r>
+                      <a:rPr lang="en-US" altLang="zh-CN" i="1">
+                        <a:latin typeface="Cambria Math" panose="02040503050406030204" pitchFamily="18" charset="0"/>
+                      </a:rPr>
+                      <m:t>𝛼</m:t>
+                    </m:r>
+                    <m:r>
+                      <a:rPr lang="en-US" altLang="zh-CN" i="1">
+                        <a:latin typeface="Cambria Math" panose="02040503050406030204" pitchFamily="18" charset="0"/>
+                      </a:rPr>
+                      <m:t>)</m:t>
+                    </m:r>
+                    <m:sSub>
+                      <m:sSubPr>
+                        <m:ctrlPr>
+                          <a:rPr lang="en-US" altLang="zh-CN" i="1">
+                            <a:latin typeface="Cambria Math" panose="02040503050406030204" pitchFamily="18" charset="0"/>
+                          </a:rPr>
+                        </m:ctrlPr>
+                      </m:sSubPr>
+                      <m:e>
+                        <m:r>
+                          <a:rPr lang="en-US" altLang="zh-CN" i="1">
+                            <a:latin typeface="Cambria Math" panose="02040503050406030204" pitchFamily="18" charset="0"/>
+                          </a:rPr>
+                          <m:t>𝜏</m:t>
+                        </m:r>
+                      </m:e>
+                      <m:sub>
+                        <m:r>
+                          <a:rPr lang="en-US" altLang="zh-CN" i="1">
+                            <a:latin typeface="Cambria Math" panose="02040503050406030204" pitchFamily="18" charset="0"/>
+                          </a:rPr>
+                          <m:t>𝑛</m:t>
+                        </m:r>
+                      </m:sub>
+                    </m:sSub>
+                  </m:oMath>
+                </a14:m>
+                <a:r>
+                  <a:rPr lang="en-US" altLang="ko-KR" dirty="0">
+                    <a:sym typeface="Symbol" panose="05050102010706020507" pitchFamily="18" charset="2"/>
+                  </a:rPr>
+                  <a:t> to predict the next burst time. Assume initial estimate </a:t>
+                </a:r>
+                <a:r>
+                  <a:rPr lang="en-US" altLang="ko-KR" baseline="-25000" dirty="0">
+                    <a:sym typeface="Symbol" panose="05050102010706020507" pitchFamily="18" charset="2"/>
+                  </a:rPr>
+                  <a:t>0</a:t>
+                </a:r>
+                <a:r>
+                  <a:rPr lang="en-US" altLang="ko-KR" dirty="0">
+                    <a:sym typeface="Symbol" panose="05050102010706020507" pitchFamily="18" charset="2"/>
+                  </a:rPr>
+                  <a:t> = 10, and the </a:t>
+                </a:r>
+                <a:r>
+                  <a:rPr lang="en-GB" altLang="zh-CN" dirty="0"/>
+                  <a:t>actual burst times of the first four processes </a:t>
+                </a:r>
+                <a:r>
+                  <a:rPr lang="en-US" altLang="ko-KR" dirty="0">
+                    <a:sym typeface="Symbol" panose="05050102010706020507" pitchFamily="18" charset="2"/>
+                  </a:rPr>
+                  <a:t>t</a:t>
+                </a:r>
+                <a:r>
+                  <a:rPr lang="en-US" altLang="ko-KR" baseline="-25000" dirty="0">
+                    <a:sym typeface="Symbol" panose="05050102010706020507" pitchFamily="18" charset="2"/>
+                  </a:rPr>
+                  <a:t>0</a:t>
+                </a:r>
+                <a:r>
+                  <a:rPr lang="en-GB" altLang="zh-CN" dirty="0"/>
+                  <a:t>, </a:t>
+                </a:r>
+                <a:r>
+                  <a:rPr lang="en-US" altLang="ko-KR" dirty="0">
+                    <a:sym typeface="Symbol" panose="05050102010706020507" pitchFamily="18" charset="2"/>
+                  </a:rPr>
+                  <a:t>t</a:t>
+                </a:r>
+                <a:r>
+                  <a:rPr lang="en-US" altLang="ko-KR" baseline="-25000" dirty="0">
+                    <a:sym typeface="Symbol" panose="05050102010706020507" pitchFamily="18" charset="2"/>
+                  </a:rPr>
+                  <a:t>1</a:t>
+                </a:r>
+                <a:r>
+                  <a:rPr lang="en-GB" altLang="zh-CN" dirty="0"/>
+                  <a:t>, </a:t>
+                </a:r>
+                <a:r>
+                  <a:rPr lang="en-US" altLang="ko-KR" dirty="0">
+                    <a:sym typeface="Symbol" panose="05050102010706020507" pitchFamily="18" charset="2"/>
+                  </a:rPr>
+                  <a:t>t</a:t>
+                </a:r>
+                <a:r>
+                  <a:rPr lang="en-US" altLang="ko-KR" baseline="-25000" dirty="0">
+                    <a:sym typeface="Symbol" panose="05050102010706020507" pitchFamily="18" charset="2"/>
+                  </a:rPr>
+                  <a:t>2</a:t>
+                </a:r>
+                <a:r>
+                  <a:rPr lang="en-GB" altLang="zh-CN" dirty="0"/>
+                  <a:t>, </a:t>
+                </a:r>
+                <a:r>
+                  <a:rPr lang="en-US" altLang="ko-KR" dirty="0">
+                    <a:sym typeface="Symbol" panose="05050102010706020507" pitchFamily="18" charset="2"/>
+                  </a:rPr>
+                  <a:t>t</a:t>
+                </a:r>
+                <a:r>
+                  <a:rPr lang="en-US" altLang="ko-KR" baseline="-25000" dirty="0">
+                    <a:sym typeface="Symbol" panose="05050102010706020507" pitchFamily="18" charset="2"/>
+                  </a:rPr>
+                  <a:t>3</a:t>
+                </a:r>
+                <a:r>
+                  <a:rPr lang="en-GB" altLang="zh-CN" dirty="0"/>
+                  <a:t> are 4, 8, 6 and 7, respectively. Given α = 0.5. Compute the predicted burst times </a:t>
+                </a:r>
+                <a:r>
+                  <a:rPr lang="en-US" altLang="ko-KR" dirty="0">
+                    <a:sym typeface="Symbol" panose="05050102010706020507" pitchFamily="18" charset="2"/>
+                  </a:rPr>
+                  <a:t></a:t>
+                </a:r>
+                <a:r>
+                  <a:rPr lang="en-US" altLang="ko-KR" baseline="-25000" dirty="0">
+                    <a:sym typeface="Symbol" panose="05050102010706020507" pitchFamily="18" charset="2"/>
+                  </a:rPr>
+                  <a:t>1</a:t>
+                </a:r>
+                <a:r>
+                  <a:rPr lang="en-US" altLang="ko-KR" dirty="0">
+                    <a:sym typeface="Symbol" panose="05050102010706020507" pitchFamily="18" charset="2"/>
+                  </a:rPr>
+                  <a:t>, </a:t>
+                </a:r>
+                <a:r>
+                  <a:rPr lang="en-US" altLang="ko-KR" baseline="-25000" dirty="0">
+                    <a:sym typeface="Symbol" panose="05050102010706020507" pitchFamily="18" charset="2"/>
+                  </a:rPr>
+                  <a:t>2</a:t>
+                </a:r>
+                <a:r>
+                  <a:rPr lang="en-US" altLang="ko-KR" dirty="0">
+                    <a:sym typeface="Symbol" panose="05050102010706020507" pitchFamily="18" charset="2"/>
+                  </a:rPr>
+                  <a:t>, </a:t>
+                </a:r>
+                <a:r>
+                  <a:rPr lang="en-US" altLang="ko-KR" baseline="-25000" dirty="0">
+                    <a:sym typeface="Symbol" panose="05050102010706020507" pitchFamily="18" charset="2"/>
+                  </a:rPr>
+                  <a:t>3</a:t>
+                </a:r>
+                <a:r>
+                  <a:rPr lang="en-US" altLang="ko-KR" dirty="0">
+                    <a:sym typeface="Symbol" panose="05050102010706020507" pitchFamily="18" charset="2"/>
+                  </a:rPr>
+                  <a:t>, </a:t>
+                </a:r>
+                <a:r>
+                  <a:rPr lang="en-US" altLang="ko-KR" baseline="-25000" dirty="0">
+                    <a:sym typeface="Symbol" panose="05050102010706020507" pitchFamily="18" charset="2"/>
+                  </a:rPr>
+                  <a:t>4.</a:t>
+                </a:r>
+                <a:endParaRPr lang="en-GB" altLang="zh-CN" dirty="0"/>
+              </a:p>
+            </p:txBody>
+          </p:sp>
+        </mc:Choice>
+        <mc:Fallback>
+          <p:sp>
+            <p:nvSpPr>
+              <p:cNvPr id="3" name="Content Placeholder 2">
+                <a:extLst>
+                  <a:ext uri="{FF2B5EF4-FFF2-40B4-BE49-F238E27FC236}">
+                    <a16:creationId xmlns:a16="http://schemas.microsoft.com/office/drawing/2014/main" id="{A568D32D-8A26-D01F-B9B1-DC028CCAB513}"/>
+                  </a:ext>
+                </a:extLst>
+              </p:cNvPr>
+              <p:cNvSpPr>
+                <a:spLocks noGrp="1" noRot="1" noChangeAspect="1" noMove="1" noResize="1" noEditPoints="1" noAdjustHandles="1" noChangeArrowheads="1" noChangeShapeType="1" noTextEdit="1"/>
+              </p:cNvSpPr>
+              <p:nvPr>
+                <p:ph idx="1"/>
+              </p:nvPr>
+            </p:nvSpPr>
+            <p:spPr>
+              <a:blipFill>
+                <a:blip r:embed="rId2"/>
+                <a:stretch>
+                  <a:fillRect l="-1211" t="-2148" r="-577"/>
+                </a:stretch>
+              </a:blipFill>
+            </p:spPr>
+            <p:txBody>
+              <a:bodyPr/>
+              <a:lstStyle/>
+              <a:p>
+                <a:r>
+                  <a:rPr lang="zh-CN" altLang="en-US">
+                    <a:noFill/>
+                  </a:rPr>
+                  <a:t> </a:t>
+                </a:r>
+              </a:p>
+            </p:txBody>
+          </p:sp>
+        </mc:Fallback>
+      </mc:AlternateContent>
     </p:spTree>
     <p:extLst>
       <p:ext uri="{BB962C8B-B14F-4D97-AF65-F5344CB8AC3E}">
@@ -12048,7 +12166,7 @@
         <a:effectLst/>
         <a:extLst>
           <a:ext uri="{AF507438-7753-43e0-B8FC-AC1667EBCBE1}">
-            <a14:hiddenEffects xmlns:a14="http://schemas.microsoft.com/office/drawing/2010/main" xmlns="">
+            <a14:hiddenEffects xmlns="" xmlns:a14="http://schemas.microsoft.com/office/drawing/2010/main">
               <a:effectLst>
                 <a:outerShdw dist="35921" dir="2700000" algn="ctr" rotWithShape="0">
                   <a:schemeClr val="bg2"/>
@@ -12121,7 +12239,7 @@
         <a:effectLst/>
         <a:extLst>
           <a:ext uri="{AF507438-7753-43e0-B8FC-AC1667EBCBE1}">
-            <a14:hiddenEffects xmlns:a14="http://schemas.microsoft.com/office/drawing/2010/main" xmlns="">
+            <a14:hiddenEffects xmlns="" xmlns:a14="http://schemas.microsoft.com/office/drawing/2010/main">
               <a:effectLst>
                 <a:outerShdw dist="35921" dir="2700000" algn="ctr" rotWithShape="0">
                   <a:schemeClr val="bg2"/>
